--- a/labs/lab-14-upload-a-shared-skill-for-slides/Lumina-Living-Lab-14-Draft-Deck.pptx
+++ b/labs/lab-14-upload-a-shared-skill-for-slides/Lumina-Living-Lab-14-Draft-Deck.pptx
@@ -12,7 +12,7 @@
     <p:sldId id="260" r:id="rId11"/>
     <p:sldId id="261" r:id="rId12"/>
   </p:sldIdLst>
-  <p:sldSz cx="9144000" cy="6858000" type="screen4x3"/>
+  <p:sldSz cx="12191695" cy="6858000" type="screen4x3"/>
   <p:notesSz cx="6858000" cy="9144000"/>
   <p:defaultTextStyle>
     <a:defPPr>
